--- a/proposals/機種分析/スーパーブラックジャック/blackjack_guide_v2.pptx
+++ b/proposals/機種分析/スーパーブラックジャック/blackjack_guide_v2.pptx
@@ -6550,7 +6550,7 @@
         <p:spPr>
           <a:xfrm>
             <a:off x="201168" y="713232"/>
-            <a:ext cx="2743200" cy="2971800"/>
+            <a:ext cx="2743200" cy="1993392"/>
           </a:xfrm>
           <a:prstGeom prst="rect">
             <a:avLst/>
@@ -6673,7 +6673,7 @@
         <p:spPr>
           <a:xfrm>
             <a:off x="241168" y="1053232"/>
-            <a:ext cx="2468880" cy="1150000"/>
+            <a:ext cx="2468880" cy="920000"/>
           </a:xfrm>
           <a:prstGeom prst="rect">
             <a:avLst/>
@@ -6709,8 +6709,8 @@
         </p:nvSpPr>
         <p:spPr>
           <a:xfrm>
-            <a:off x="241168" y="2273232"/>
-            <a:ext cx="2468880" cy="330000"/>
+            <a:off x="241168" y="2043232"/>
+            <a:ext cx="2468880" cy="290000"/>
           </a:xfrm>
           <a:prstGeom prst="rect">
             <a:avLst/>
@@ -6754,8 +6754,8 @@
         </p:nvSpPr>
         <p:spPr>
           <a:xfrm>
-            <a:off x="271168" y="2293232"/>
-            <a:ext cx="2377440" cy="310000"/>
+            <a:off x="271168" y="2063232"/>
+            <a:ext cx="2377440" cy="270000"/>
           </a:xfrm>
           <a:prstGeom prst="rect">
             <a:avLst/>
@@ -6790,7 +6790,7 @@
         <p:spPr>
           <a:xfrm>
             <a:off x="3172968" y="713232"/>
-            <a:ext cx="2743200" cy="2971800"/>
+            <a:ext cx="2743200" cy="1993392"/>
           </a:xfrm>
           <a:prstGeom prst="rect">
             <a:avLst/>
@@ -6913,7 +6913,7 @@
         <p:spPr>
           <a:xfrm>
             <a:off x="3212968" y="1053232"/>
-            <a:ext cx="2468880" cy="1150000"/>
+            <a:ext cx="2468880" cy="920000"/>
           </a:xfrm>
           <a:prstGeom prst="rect">
             <a:avLst/>
@@ -6949,8 +6949,8 @@
         </p:nvSpPr>
         <p:spPr>
           <a:xfrm>
-            <a:off x="3212968" y="2273232"/>
-            <a:ext cx="2468880" cy="330000"/>
+            <a:off x="3212968" y="2043232"/>
+            <a:ext cx="2468880" cy="290000"/>
           </a:xfrm>
           <a:prstGeom prst="rect">
             <a:avLst/>
@@ -6994,8 +6994,8 @@
         </p:nvSpPr>
         <p:spPr>
           <a:xfrm>
-            <a:off x="3242968" y="2293232"/>
-            <a:ext cx="2377440" cy="310000"/>
+            <a:off x="3242968" y="2063232"/>
+            <a:ext cx="2377440" cy="270000"/>
           </a:xfrm>
           <a:prstGeom prst="rect">
             <a:avLst/>
@@ -7030,7 +7030,7 @@
         <p:spPr>
           <a:xfrm>
             <a:off x="6144768" y="713232"/>
-            <a:ext cx="2743200" cy="2971800"/>
+            <a:ext cx="2743200" cy="1993392"/>
           </a:xfrm>
           <a:prstGeom prst="rect">
             <a:avLst/>
@@ -7153,7 +7153,7 @@
         <p:spPr>
           <a:xfrm>
             <a:off x="6184768" y="1053232"/>
-            <a:ext cx="2468880" cy="1150000"/>
+            <a:ext cx="2468880" cy="920000"/>
           </a:xfrm>
           <a:prstGeom prst="rect">
             <a:avLst/>
@@ -7189,8 +7189,8 @@
         </p:nvSpPr>
         <p:spPr>
           <a:xfrm>
-            <a:off x="6184768" y="2273232"/>
-            <a:ext cx="2468880" cy="330000"/>
+            <a:off x="6184768" y="2043232"/>
+            <a:ext cx="2468880" cy="290000"/>
           </a:xfrm>
           <a:prstGeom prst="rect">
             <a:avLst/>
@@ -7234,8 +7234,8 @@
         </p:nvSpPr>
         <p:spPr>
           <a:xfrm>
-            <a:off x="6214768" y="2293232"/>
-            <a:ext cx="2377440" cy="310000"/>
+            <a:off x="6214768" y="2063232"/>
+            <a:ext cx="2377440" cy="270000"/>
           </a:xfrm>
           <a:prstGeom prst="rect">
             <a:avLst/>
@@ -7263,14 +7263,49 @@
       </p:sp>
       <p:sp>
         <p:nvSpPr>
-          <p:cNvPr id="26" name="Rectangle 25"/>
+          <p:cNvPr id="26" name="TextBox 25"/>
+          <p:cNvSpPr txBox="1"/>
+          <p:nvPr/>
+        </p:nvSpPr>
+        <p:spPr>
+          <a:xfrm>
+            <a:off x="201168" y="2834640"/>
+            <a:ext cx="8229600" cy="260000"/>
+          </a:xfrm>
+          <a:prstGeom prst="rect">
+            <a:avLst/>
+          </a:prstGeom>
+          <a:noFill/>
+        </p:spPr>
+        <p:txBody>
+          <a:bodyPr wrap="square">
+            <a:spAutoFit/>
+          </a:bodyPr>
+          <a:lstStyle/>
+          <a:p>
+            <a:pPr algn="l"/>
+            <a:r>
+              <a:rPr sz="1000" b="1">
+                <a:solidFill>
+                  <a:srgbClr val="0C7A3F"/>
+                </a:solidFill>
+                <a:latin typeface="メイリオ"/>
+              </a:rPr>
+              <a:t>通常時 カジノバトル演出（4種）── ボーナス告知の舞台</a:t>
+            </a:r>
+          </a:p>
+        </p:txBody>
+      </p:sp>
+      <p:sp>
+        <p:nvSpPr>
+          <p:cNvPr id="27" name="Rectangle 26"/>
           <p:cNvSpPr/>
           <p:nvPr/>
         </p:nvSpPr>
         <p:spPr>
           <a:xfrm>
-            <a:off x="201168" y="3813048"/>
-            <a:ext cx="8778240" cy="680000"/>
+            <a:off x="201168" y="3090672"/>
+            <a:ext cx="2029968" cy="1444752"/>
           </a:xfrm>
           <a:prstGeom prst="rect">
             <a:avLst/>
@@ -7278,7 +7313,7 @@
           <a:solidFill>
             <a:srgbClr val="ECF8F2"/>
           </a:solidFill>
-          <a:ln w="12700">
+          <a:ln w="19050">
             <a:solidFill>
               <a:srgbClr val="0C7A3F"/>
             </a:solidFill>
@@ -7308,119 +7343,14 @@
       </p:sp>
       <p:sp>
         <p:nvSpPr>
-          <p:cNvPr id="27" name="TextBox 26"/>
-          <p:cNvSpPr txBox="1"/>
-          <p:nvPr/>
-        </p:nvSpPr>
-        <p:spPr>
-          <a:xfrm>
-            <a:off x="320040" y="3840480"/>
-            <a:ext cx="8412480" cy="260000"/>
-          </a:xfrm>
-          <a:prstGeom prst="rect">
-            <a:avLst/>
-          </a:prstGeom>
-          <a:noFill/>
-        </p:spPr>
-        <p:txBody>
-          <a:bodyPr wrap="square">
-            <a:spAutoFit/>
-          </a:bodyPr>
-          <a:lstStyle/>
-          <a:p>
-            <a:pPr algn="l"/>
-            <a:r>
-              <a:rPr sz="1000" b="1">
-                <a:solidFill>
-                  <a:srgbClr val="0C7A3F"/>
-                </a:solidFill>
-                <a:latin typeface="メイリオ"/>
-              </a:rPr>
-              <a:t>BIG BONUS 2種類</a:t>
-            </a:r>
-          </a:p>
-        </p:txBody>
-      </p:sp>
-      <p:sp>
-        <p:nvSpPr>
-          <p:cNvPr id="28" name="TextBox 27"/>
-          <p:cNvSpPr txBox="1"/>
-          <p:nvPr/>
-        </p:nvSpPr>
-        <p:spPr>
-          <a:xfrm>
-            <a:off x="320040" y="4096512"/>
-            <a:ext cx="4023360" cy="310000"/>
-          </a:xfrm>
-          <a:prstGeom prst="rect">
-            <a:avLst/>
-          </a:prstGeom>
-          <a:noFill/>
-        </p:spPr>
-        <p:txBody>
-          <a:bodyPr wrap="square">
-            <a:spAutoFit/>
-          </a:bodyPr>
-          <a:lstStyle/>
-          <a:p>
-            <a:pPr algn="l"/>
-            <a:r>
-              <a:rPr sz="850" b="0">
-                <a:solidFill>
-                  <a:srgbClr val="1A1408"/>
-                </a:solidFill>
-                <a:latin typeface="メイリオ"/>
-              </a:rPr>
-              <a:t>青7揃い BIG（300枚払い出し）→ RC高確確定・SBJループ突入</a:t>
-            </a:r>
-          </a:p>
-        </p:txBody>
-      </p:sp>
-      <p:sp>
-        <p:nvSpPr>
-          <p:cNvPr id="29" name="TextBox 28"/>
-          <p:cNvSpPr txBox="1"/>
-          <p:nvPr/>
-        </p:nvSpPr>
-        <p:spPr>
-          <a:xfrm>
-            <a:off x="4480560" y="4096512"/>
-            <a:ext cx="4480560" cy="310000"/>
-          </a:xfrm>
-          <a:prstGeom prst="rect">
-            <a:avLst/>
-          </a:prstGeom>
-          <a:noFill/>
-        </p:spPr>
-        <p:txBody>
-          <a:bodyPr wrap="square">
-            <a:spAutoFit/>
-          </a:bodyPr>
-          <a:lstStyle/>
-          <a:p>
-            <a:pPr algn="l"/>
-            <a:r>
-              <a:rPr sz="850" b="0">
-                <a:solidFill>
-                  <a:srgbClr val="CC2222"/>
-                </a:solidFill>
-                <a:latin typeface="メイリオ"/>
-              </a:rPr>
-              <a:t>赤7揃い BIG（100枚払い出し）→ RC高確移行・ループ期待度やや低</a:t>
-            </a:r>
-          </a:p>
-        </p:txBody>
-      </p:sp>
-      <p:sp>
-        <p:nvSpPr>
-          <p:cNvPr id="30" name="Rectangle 29"/>
+          <p:cNvPr id="28" name="Rectangle 27"/>
           <p:cNvSpPr/>
           <p:nvPr/>
         </p:nvSpPr>
         <p:spPr>
           <a:xfrm>
-            <a:off x="0" y="4617720"/>
-            <a:ext cx="9144000" cy="502920"/>
+            <a:off x="201168" y="3090672"/>
+            <a:ext cx="2029968" cy="52000"/>
           </a:xfrm>
           <a:prstGeom prst="rect">
             <a:avLst/>
@@ -7456,7 +7386,598 @@
       </p:sp>
       <p:sp>
         <p:nvSpPr>
-          <p:cNvPr id="31" name="TextBox 30"/>
+          <p:cNvPr id="29" name="TextBox 28"/>
+          <p:cNvSpPr txBox="1"/>
+          <p:nvPr/>
+        </p:nvSpPr>
+        <p:spPr>
+          <a:xfrm>
+            <a:off x="241168" y="3152672"/>
+            <a:ext cx="1969968" cy="260000"/>
+          </a:xfrm>
+          <a:prstGeom prst="rect">
+            <a:avLst/>
+          </a:prstGeom>
+          <a:noFill/>
+        </p:spPr>
+        <p:txBody>
+          <a:bodyPr wrap="square">
+            <a:spAutoFit/>
+          </a:bodyPr>
+          <a:lstStyle/>
+          <a:p>
+            <a:pPr algn="l"/>
+            <a:r>
+              <a:rPr sz="950" b="1">
+                <a:solidFill>
+                  <a:srgbClr val="0C7A3F"/>
+                </a:solidFill>
+                <a:latin typeface="メイリオ"/>
+              </a:rPr>
+              <a:t>ブラックジャック</a:t>
+            </a:r>
+          </a:p>
+        </p:txBody>
+      </p:sp>
+      <p:sp>
+        <p:nvSpPr>
+          <p:cNvPr id="30" name="TextBox 29"/>
+          <p:cNvSpPr txBox="1"/>
+          <p:nvPr/>
+        </p:nvSpPr>
+        <p:spPr>
+          <a:xfrm>
+            <a:off x="241168" y="3420672"/>
+            <a:ext cx="1969968" cy="820000"/>
+          </a:xfrm>
+          <a:prstGeom prst="rect">
+            <a:avLst/>
+          </a:prstGeom>
+          <a:noFill/>
+        </p:spPr>
+        <p:txBody>
+          <a:bodyPr wrap="square">
+            <a:spAutoFit/>
+          </a:bodyPr>
+          <a:lstStyle/>
+          <a:p>
+            <a:pPr algn="l"/>
+            <a:r>
+              <a:rPr sz="800" b="0">
+                <a:solidFill>
+                  <a:srgbClr val="1A1408"/>
+                </a:solidFill>
+                <a:latin typeface="メイリオ"/>
+              </a:rPr>
+              <a:t>相手チップがなくなるとBONUS以上確定
+対戦相手（ハワード/ローザ等）で期待度変化</a:t>
+            </a:r>
+          </a:p>
+        </p:txBody>
+      </p:sp>
+      <p:sp>
+        <p:nvSpPr>
+          <p:cNvPr id="31" name="Rectangle 30"/>
+          <p:cNvSpPr/>
+          <p:nvPr/>
+        </p:nvSpPr>
+        <p:spPr>
+          <a:xfrm>
+            <a:off x="2414016" y="3090672"/>
+            <a:ext cx="2029968" cy="1444752"/>
+          </a:xfrm>
+          <a:prstGeom prst="rect">
+            <a:avLst/>
+          </a:prstGeom>
+          <a:solidFill>
+            <a:srgbClr val="FFEDED"/>
+          </a:solidFill>
+          <a:ln w="19050">
+            <a:solidFill>
+              <a:srgbClr val="CC2222"/>
+            </a:solidFill>
+          </a:ln>
+        </p:spPr>
+        <p:style>
+          <a:lnRef idx="1">
+            <a:schemeClr val="accent1"/>
+          </a:lnRef>
+          <a:fillRef idx="3">
+            <a:schemeClr val="accent1"/>
+          </a:fillRef>
+          <a:effectRef idx="2">
+            <a:schemeClr val="accent1"/>
+          </a:effectRef>
+          <a:fontRef idx="minor">
+            <a:schemeClr val="lt1"/>
+          </a:fontRef>
+        </p:style>
+        <p:txBody>
+          <a:bodyPr rtlCol="0" anchor="ctr"/>
+          <a:lstStyle/>
+          <a:p>
+            <a:pPr algn="ctr"/>
+          </a:p>
+        </p:txBody>
+      </p:sp>
+      <p:sp>
+        <p:nvSpPr>
+          <p:cNvPr id="32" name="Rectangle 31"/>
+          <p:cNvSpPr/>
+          <p:nvPr/>
+        </p:nvSpPr>
+        <p:spPr>
+          <a:xfrm>
+            <a:off x="2414016" y="3090672"/>
+            <a:ext cx="2029968" cy="52000"/>
+          </a:xfrm>
+          <a:prstGeom prst="rect">
+            <a:avLst/>
+          </a:prstGeom>
+          <a:solidFill>
+            <a:srgbClr val="CC2222"/>
+          </a:solidFill>
+          <a:ln>
+            <a:noFill/>
+          </a:ln>
+        </p:spPr>
+        <p:style>
+          <a:lnRef idx="1">
+            <a:schemeClr val="accent1"/>
+          </a:lnRef>
+          <a:fillRef idx="3">
+            <a:schemeClr val="accent1"/>
+          </a:fillRef>
+          <a:effectRef idx="2">
+            <a:schemeClr val="accent1"/>
+          </a:effectRef>
+          <a:fontRef idx="minor">
+            <a:schemeClr val="lt1"/>
+          </a:fontRef>
+        </p:style>
+        <p:txBody>
+          <a:bodyPr rtlCol="0" anchor="ctr"/>
+          <a:lstStyle/>
+          <a:p>
+            <a:pPr algn="ctr"/>
+          </a:p>
+        </p:txBody>
+      </p:sp>
+      <p:sp>
+        <p:nvSpPr>
+          <p:cNvPr id="33" name="TextBox 32"/>
+          <p:cNvSpPr txBox="1"/>
+          <p:nvPr/>
+        </p:nvSpPr>
+        <p:spPr>
+          <a:xfrm>
+            <a:off x="2454016" y="3152672"/>
+            <a:ext cx="1969968" cy="260000"/>
+          </a:xfrm>
+          <a:prstGeom prst="rect">
+            <a:avLst/>
+          </a:prstGeom>
+          <a:noFill/>
+        </p:spPr>
+        <p:txBody>
+          <a:bodyPr wrap="square">
+            <a:spAutoFit/>
+          </a:bodyPr>
+          <a:lstStyle/>
+          <a:p>
+            <a:pPr algn="l"/>
+            <a:r>
+              <a:rPr sz="950" b="1">
+                <a:solidFill>
+                  <a:srgbClr val="CC2222"/>
+                </a:solidFill>
+                <a:latin typeface="メイリオ"/>
+              </a:rPr>
+              <a:t>ポーカー</a:t>
+            </a:r>
+          </a:p>
+        </p:txBody>
+      </p:sp>
+      <p:sp>
+        <p:nvSpPr>
+          <p:cNvPr id="34" name="TextBox 33"/>
+          <p:cNvSpPr txBox="1"/>
+          <p:nvPr/>
+        </p:nvSpPr>
+        <p:spPr>
+          <a:xfrm>
+            <a:off x="2454016" y="3420672"/>
+            <a:ext cx="1969968" cy="820000"/>
+          </a:xfrm>
+          <a:prstGeom prst="rect">
+            <a:avLst/>
+          </a:prstGeom>
+          <a:noFill/>
+        </p:spPr>
+        <p:txBody>
+          <a:bodyPr wrap="square">
+            <a:spAutoFit/>
+          </a:bodyPr>
+          <a:lstStyle/>
+          <a:p>
+            <a:pPr algn="l"/>
+            <a:r>
+              <a:rPr sz="800" b="0">
+                <a:solidFill>
+                  <a:srgbClr val="1A1408"/>
+                </a:solidFill>
+                <a:latin typeface="メイリオ"/>
+              </a:rPr>
+              <a:t>継続するほど期待度UP
+勝利濃厚パターンあり</a:t>
+            </a:r>
+          </a:p>
+        </p:txBody>
+      </p:sp>
+      <p:sp>
+        <p:nvSpPr>
+          <p:cNvPr id="35" name="Rectangle 34"/>
+          <p:cNvSpPr/>
+          <p:nvPr/>
+        </p:nvSpPr>
+        <p:spPr>
+          <a:xfrm>
+            <a:off x="4626864" y="3090672"/>
+            <a:ext cx="2029968" cy="1444752"/>
+          </a:xfrm>
+          <a:prstGeom prst="rect">
+            <a:avLst/>
+          </a:prstGeom>
+          <a:solidFill>
+            <a:srgbClr val="FEFAEA"/>
+          </a:solidFill>
+          <a:ln w="19050">
+            <a:solidFill>
+              <a:srgbClr val="BB9015"/>
+            </a:solidFill>
+          </a:ln>
+        </p:spPr>
+        <p:style>
+          <a:lnRef idx="1">
+            <a:schemeClr val="accent1"/>
+          </a:lnRef>
+          <a:fillRef idx="3">
+            <a:schemeClr val="accent1"/>
+          </a:fillRef>
+          <a:effectRef idx="2">
+            <a:schemeClr val="accent1"/>
+          </a:effectRef>
+          <a:fontRef idx="minor">
+            <a:schemeClr val="lt1"/>
+          </a:fontRef>
+        </p:style>
+        <p:txBody>
+          <a:bodyPr rtlCol="0" anchor="ctr"/>
+          <a:lstStyle/>
+          <a:p>
+            <a:pPr algn="ctr"/>
+          </a:p>
+        </p:txBody>
+      </p:sp>
+      <p:sp>
+        <p:nvSpPr>
+          <p:cNvPr id="36" name="Rectangle 35"/>
+          <p:cNvSpPr/>
+          <p:nvPr/>
+        </p:nvSpPr>
+        <p:spPr>
+          <a:xfrm>
+            <a:off x="4626864" y="3090672"/>
+            <a:ext cx="2029968" cy="52000"/>
+          </a:xfrm>
+          <a:prstGeom prst="rect">
+            <a:avLst/>
+          </a:prstGeom>
+          <a:solidFill>
+            <a:srgbClr val="BB9015"/>
+          </a:solidFill>
+          <a:ln>
+            <a:noFill/>
+          </a:ln>
+        </p:spPr>
+        <p:style>
+          <a:lnRef idx="1">
+            <a:schemeClr val="accent1"/>
+          </a:lnRef>
+          <a:fillRef idx="3">
+            <a:schemeClr val="accent1"/>
+          </a:fillRef>
+          <a:effectRef idx="2">
+            <a:schemeClr val="accent1"/>
+          </a:effectRef>
+          <a:fontRef idx="minor">
+            <a:schemeClr val="lt1"/>
+          </a:fontRef>
+        </p:style>
+        <p:txBody>
+          <a:bodyPr rtlCol="0" anchor="ctr"/>
+          <a:lstStyle/>
+          <a:p>
+            <a:pPr algn="ctr"/>
+          </a:p>
+        </p:txBody>
+      </p:sp>
+      <p:sp>
+        <p:nvSpPr>
+          <p:cNvPr id="37" name="TextBox 36"/>
+          <p:cNvSpPr txBox="1"/>
+          <p:nvPr/>
+        </p:nvSpPr>
+        <p:spPr>
+          <a:xfrm>
+            <a:off x="4666864" y="3152672"/>
+            <a:ext cx="1969968" cy="260000"/>
+          </a:xfrm>
+          <a:prstGeom prst="rect">
+            <a:avLst/>
+          </a:prstGeom>
+          <a:noFill/>
+        </p:spPr>
+        <p:txBody>
+          <a:bodyPr wrap="square">
+            <a:spAutoFit/>
+          </a:bodyPr>
+          <a:lstStyle/>
+          <a:p>
+            <a:pPr algn="l"/>
+            <a:r>
+              <a:rPr sz="950" b="1">
+                <a:solidFill>
+                  <a:srgbClr val="BB9015"/>
+                </a:solidFill>
+                <a:latin typeface="メイリオ"/>
+              </a:rPr>
+              <a:t>ルーレット</a:t>
+            </a:r>
+          </a:p>
+        </p:txBody>
+      </p:sp>
+      <p:sp>
+        <p:nvSpPr>
+          <p:cNvPr id="38" name="TextBox 37"/>
+          <p:cNvSpPr txBox="1"/>
+          <p:nvPr/>
+        </p:nvSpPr>
+        <p:spPr>
+          <a:xfrm>
+            <a:off x="4666864" y="3420672"/>
+            <a:ext cx="1969968" cy="820000"/>
+          </a:xfrm>
+          <a:prstGeom prst="rect">
+            <a:avLst/>
+          </a:prstGeom>
+          <a:noFill/>
+        </p:spPr>
+        <p:txBody>
+          <a:bodyPr wrap="square">
+            <a:spAutoFit/>
+          </a:bodyPr>
+          <a:lstStyle/>
+          <a:p>
+            <a:pPr algn="l"/>
+            <a:r>
+              <a:rPr sz="800" b="0">
+                <a:solidFill>
+                  <a:srgbClr val="1A1408"/>
+                </a:solidFill>
+                <a:latin typeface="メイリオ"/>
+              </a:rPr>
+              <a:t>ボールがWINに落ちれば勝利
+チップ乱入で期待度UP</a:t>
+            </a:r>
+          </a:p>
+        </p:txBody>
+      </p:sp>
+      <p:sp>
+        <p:nvSpPr>
+          <p:cNvPr id="39" name="Rectangle 38"/>
+          <p:cNvSpPr/>
+          <p:nvPr/>
+        </p:nvSpPr>
+        <p:spPr>
+          <a:xfrm>
+            <a:off x="6839712" y="3090672"/>
+            <a:ext cx="2029968" cy="1444752"/>
+          </a:xfrm>
+          <a:prstGeom prst="rect">
+            <a:avLst/>
+          </a:prstGeom>
+          <a:solidFill>
+            <a:srgbClr val="ECFFF5"/>
+          </a:solidFill>
+          <a:ln w="19050">
+            <a:solidFill>
+              <a:srgbClr val="119966"/>
+            </a:solidFill>
+          </a:ln>
+        </p:spPr>
+        <p:style>
+          <a:lnRef idx="1">
+            <a:schemeClr val="accent1"/>
+          </a:lnRef>
+          <a:fillRef idx="3">
+            <a:schemeClr val="accent1"/>
+          </a:fillRef>
+          <a:effectRef idx="2">
+            <a:schemeClr val="accent1"/>
+          </a:effectRef>
+          <a:fontRef idx="minor">
+            <a:schemeClr val="lt1"/>
+          </a:fontRef>
+        </p:style>
+        <p:txBody>
+          <a:bodyPr rtlCol="0" anchor="ctr"/>
+          <a:lstStyle/>
+          <a:p>
+            <a:pPr algn="ctr"/>
+          </a:p>
+        </p:txBody>
+      </p:sp>
+      <p:sp>
+        <p:nvSpPr>
+          <p:cNvPr id="40" name="Rectangle 39"/>
+          <p:cNvSpPr/>
+          <p:nvPr/>
+        </p:nvSpPr>
+        <p:spPr>
+          <a:xfrm>
+            <a:off x="6839712" y="3090672"/>
+            <a:ext cx="2029968" cy="52000"/>
+          </a:xfrm>
+          <a:prstGeom prst="rect">
+            <a:avLst/>
+          </a:prstGeom>
+          <a:solidFill>
+            <a:srgbClr val="119966"/>
+          </a:solidFill>
+          <a:ln>
+            <a:noFill/>
+          </a:ln>
+        </p:spPr>
+        <p:style>
+          <a:lnRef idx="1">
+            <a:schemeClr val="accent1"/>
+          </a:lnRef>
+          <a:fillRef idx="3">
+            <a:schemeClr val="accent1"/>
+          </a:fillRef>
+          <a:effectRef idx="2">
+            <a:schemeClr val="accent1"/>
+          </a:effectRef>
+          <a:fontRef idx="minor">
+            <a:schemeClr val="lt1"/>
+          </a:fontRef>
+        </p:style>
+        <p:txBody>
+          <a:bodyPr rtlCol="0" anchor="ctr"/>
+          <a:lstStyle/>
+          <a:p>
+            <a:pPr algn="ctr"/>
+          </a:p>
+        </p:txBody>
+      </p:sp>
+      <p:sp>
+        <p:nvSpPr>
+          <p:cNvPr id="41" name="TextBox 40"/>
+          <p:cNvSpPr txBox="1"/>
+          <p:nvPr/>
+        </p:nvSpPr>
+        <p:spPr>
+          <a:xfrm>
+            <a:off x="6879712" y="3152672"/>
+            <a:ext cx="1969968" cy="260000"/>
+          </a:xfrm>
+          <a:prstGeom prst="rect">
+            <a:avLst/>
+          </a:prstGeom>
+          <a:noFill/>
+        </p:spPr>
+        <p:txBody>
+          <a:bodyPr wrap="square">
+            <a:spAutoFit/>
+          </a:bodyPr>
+          <a:lstStyle/>
+          <a:p>
+            <a:pPr algn="l"/>
+            <a:r>
+              <a:rPr sz="950" b="1">
+                <a:solidFill>
+                  <a:srgbClr val="119966"/>
+                </a:solidFill>
+                <a:latin typeface="メイリオ"/>
+              </a:rPr>
+              <a:t>ダーツ</a:t>
+            </a:r>
+          </a:p>
+        </p:txBody>
+      </p:sp>
+      <p:sp>
+        <p:nvSpPr>
+          <p:cNvPr id="42" name="TextBox 41"/>
+          <p:cNvSpPr txBox="1"/>
+          <p:nvPr/>
+        </p:nvSpPr>
+        <p:spPr>
+          <a:xfrm>
+            <a:off x="6879712" y="3420672"/>
+            <a:ext cx="1969968" cy="820000"/>
+          </a:xfrm>
+          <a:prstGeom prst="rect">
+            <a:avLst/>
+          </a:prstGeom>
+          <a:noFill/>
+        </p:spPr>
+        <p:txBody>
+          <a:bodyPr wrap="square">
+            <a:spAutoFit/>
+          </a:bodyPr>
+          <a:lstStyle/>
+          <a:p>
+            <a:pPr algn="l"/>
+            <a:r>
+              <a:rPr sz="800" b="0">
+                <a:solidFill>
+                  <a:srgbClr val="1A1408"/>
+                </a:solidFill>
+                <a:latin typeface="メイリオ"/>
+              </a:rPr>
+              <a:t>小役告知演出
+外れればBONUS以上確定</a:t>
+            </a:r>
+          </a:p>
+        </p:txBody>
+      </p:sp>
+      <p:sp>
+        <p:nvSpPr>
+          <p:cNvPr id="43" name="Rectangle 42"/>
+          <p:cNvSpPr/>
+          <p:nvPr/>
+        </p:nvSpPr>
+        <p:spPr>
+          <a:xfrm>
+            <a:off x="0" y="4617720"/>
+            <a:ext cx="9144000" cy="502920"/>
+          </a:xfrm>
+          <a:prstGeom prst="rect">
+            <a:avLst/>
+          </a:prstGeom>
+          <a:solidFill>
+            <a:srgbClr val="0C7A3F"/>
+          </a:solidFill>
+          <a:ln>
+            <a:noFill/>
+          </a:ln>
+        </p:spPr>
+        <p:style>
+          <a:lnRef idx="1">
+            <a:schemeClr val="accent1"/>
+          </a:lnRef>
+          <a:fillRef idx="3">
+            <a:schemeClr val="accent1"/>
+          </a:fillRef>
+          <a:effectRef idx="2">
+            <a:schemeClr val="accent1"/>
+          </a:effectRef>
+          <a:fontRef idx="minor">
+            <a:schemeClr val="lt1"/>
+          </a:fontRef>
+        </p:style>
+        <p:txBody>
+          <a:bodyPr rtlCol="0" anchor="ctr"/>
+          <a:lstStyle/>
+          <a:p>
+            <a:pPr algn="ctr"/>
+          </a:p>
+        </p:txBody>
+      </p:sp>
+      <p:sp>
+        <p:nvSpPr>
+          <p:cNvPr id="44" name="TextBox 43"/>
           <p:cNvSpPr txBox="1"/>
           <p:nvPr/>
         </p:nvSpPr>
@@ -7491,7 +8012,7 @@
       </p:sp>
       <p:sp>
         <p:nvSpPr>
-          <p:cNvPr id="32" name="TextBox 31"/>
+          <p:cNvPr id="45" name="TextBox 44"/>
           <p:cNvSpPr txBox="1"/>
           <p:nvPr/>
         </p:nvSpPr>
@@ -7526,7 +8047,7 @@
       </p:sp>
       <p:sp>
         <p:nvSpPr>
-          <p:cNvPr id="33" name="TextBox 32"/>
+          <p:cNvPr id="46" name="TextBox 45"/>
           <p:cNvSpPr txBox="1"/>
           <p:nvPr/>
         </p:nvSpPr>
@@ -8178,7 +8699,7 @@
         <p:spPr>
           <a:xfrm>
             <a:off x="201168" y="3337560"/>
-            <a:ext cx="2743200" cy="1115568"/>
+            <a:ext cx="2029968" cy="1115568"/>
           </a:xfrm>
           <a:prstGeom prst="rect">
             <a:avLst/>
@@ -8222,8 +8743,8 @@
         </p:nvSpPr>
         <p:spPr>
           <a:xfrm>
-            <a:off x="251168" y="3377560"/>
-            <a:ext cx="2468880" cy="270000"/>
+            <a:off x="241168" y="3377560"/>
+            <a:ext cx="1969968" cy="260000"/>
           </a:xfrm>
           <a:prstGeom prst="rect">
             <a:avLst/>
@@ -8257,8 +8778,8 @@
         </p:nvSpPr>
         <p:spPr>
           <a:xfrm>
-            <a:off x="251168" y="3647560"/>
-            <a:ext cx="2468880" cy="620000"/>
+            <a:off x="241168" y="3637560"/>
+            <a:ext cx="1969968" cy="660000"/>
           </a:xfrm>
           <a:prstGeom prst="rect">
             <a:avLst/>
@@ -8273,7 +8794,7 @@
           <a:p>
             <a:pPr algn="l"/>
             <a:r>
-              <a:rPr sz="800" b="0">
+              <a:rPr sz="750" b="0">
                 <a:solidFill>
                   <a:srgbClr val="1A1408"/>
                 </a:solidFill>
@@ -8293,8 +8814,8 @@
         </p:nvSpPr>
         <p:spPr>
           <a:xfrm>
-            <a:off x="3172968" y="3337560"/>
-            <a:ext cx="2743200" cy="1115568"/>
+            <a:off x="2414016" y="3337560"/>
+            <a:ext cx="2029968" cy="1115568"/>
           </a:xfrm>
           <a:prstGeom prst="rect">
             <a:avLst/>
@@ -8338,8 +8859,8 @@
         </p:nvSpPr>
         <p:spPr>
           <a:xfrm>
-            <a:off x="3222968" y="3377560"/>
-            <a:ext cx="2468880" cy="270000"/>
+            <a:off x="2454016" y="3377560"/>
+            <a:ext cx="1969968" cy="260000"/>
           </a:xfrm>
           <a:prstGeom prst="rect">
             <a:avLst/>
@@ -8373,8 +8894,8 @@
         </p:nvSpPr>
         <p:spPr>
           <a:xfrm>
-            <a:off x="3222968" y="3647560"/>
-            <a:ext cx="2468880" cy="620000"/>
+            <a:off x="2454016" y="3637560"/>
+            <a:ext cx="1969968" cy="660000"/>
           </a:xfrm>
           <a:prstGeom prst="rect">
             <a:avLst/>
@@ -8389,7 +8910,7 @@
           <a:p>
             <a:pPr algn="l"/>
             <a:r>
-              <a:rPr sz="800" b="0">
+              <a:rPr sz="750" b="0">
                 <a:solidFill>
                   <a:srgbClr val="1A1408"/>
                 </a:solidFill>
@@ -8409,8 +8930,8 @@
         </p:nvSpPr>
         <p:spPr>
           <a:xfrm>
-            <a:off x="6144768" y="3337560"/>
-            <a:ext cx="2743200" cy="1115568"/>
+            <a:off x="4626864" y="3337560"/>
+            <a:ext cx="2029968" cy="1115568"/>
           </a:xfrm>
           <a:prstGeom prst="rect">
             <a:avLst/>
@@ -8454,8 +8975,8 @@
         </p:nvSpPr>
         <p:spPr>
           <a:xfrm>
-            <a:off x="6194768" y="3377560"/>
-            <a:ext cx="2468880" cy="270000"/>
+            <a:off x="4666864" y="3377560"/>
+            <a:ext cx="1969968" cy="260000"/>
           </a:xfrm>
           <a:prstGeom prst="rect">
             <a:avLst/>
@@ -8489,8 +9010,8 @@
         </p:nvSpPr>
         <p:spPr>
           <a:xfrm>
-            <a:off x="6194768" y="3647560"/>
-            <a:ext cx="2468880" cy="620000"/>
+            <a:off x="4666864" y="3637560"/>
+            <a:ext cx="1969968" cy="660000"/>
           </a:xfrm>
           <a:prstGeom prst="rect">
             <a:avLst/>
@@ -8505,7 +9026,7 @@
           <a:p>
             <a:pPr algn="l"/>
             <a:r>
-              <a:rPr sz="800" b="0">
+              <a:rPr sz="750" b="0">
                 <a:solidFill>
                   <a:srgbClr val="1A1408"/>
                 </a:solidFill>
@@ -8525,17 +9046,19 @@
         </p:nvSpPr>
         <p:spPr>
           <a:xfrm>
-            <a:off x="0" y="4617720"/>
-            <a:ext cx="9144000" cy="502920"/>
-          </a:xfrm>
-          <a:prstGeom prst="rect">
-            <a:avLst/>
-          </a:prstGeom>
-          <a:solidFill>
-            <a:srgbClr val="0C7A3F"/>
-          </a:solidFill>
-          <a:ln>
-            <a:noFill/>
+            <a:off x="6839712" y="3337560"/>
+            <a:ext cx="2029968" cy="1115568"/>
+          </a:xfrm>
+          <a:prstGeom prst="rect">
+            <a:avLst/>
+          </a:prstGeom>
+          <a:solidFill>
+            <a:srgbClr val="EEF4FF"/>
+          </a:solidFill>
+          <a:ln w="19050">
+            <a:solidFill>
+              <a:srgbClr val="2266CC"/>
+            </a:solidFill>
           </a:ln>
         </p:spPr>
         <p:style>
@@ -8568,6 +9091,121 @@
         </p:nvSpPr>
         <p:spPr>
           <a:xfrm>
+            <a:off x="6879712" y="3377560"/>
+            <a:ext cx="1969968" cy="260000"/>
+          </a:xfrm>
+          <a:prstGeom prst="rect">
+            <a:avLst/>
+          </a:prstGeom>
+          <a:noFill/>
+        </p:spPr>
+        <p:txBody>
+          <a:bodyPr wrap="square">
+            <a:spAutoFit/>
+          </a:bodyPr>
+          <a:lstStyle/>
+          <a:p>
+            <a:pPr algn="l"/>
+            <a:r>
+              <a:rPr sz="900" b="1">
+                <a:solidFill>
+                  <a:srgbClr val="2266CC"/>
+                </a:solidFill>
+                <a:latin typeface="メイリオ"/>
+              </a:rPr>
+              <a:t>ダイスチェック</a:t>
+            </a:r>
+          </a:p>
+        </p:txBody>
+      </p:sp>
+      <p:sp>
+        <p:nvSpPr>
+          <p:cNvPr id="28" name="TextBox 27"/>
+          <p:cNvSpPr txBox="1"/>
+          <p:nvPr/>
+        </p:nvSpPr>
+        <p:spPr>
+          <a:xfrm>
+            <a:off x="6879712" y="3637560"/>
+            <a:ext cx="1969968" cy="660000"/>
+          </a:xfrm>
+          <a:prstGeom prst="rect">
+            <a:avLst/>
+          </a:prstGeom>
+          <a:noFill/>
+        </p:spPr>
+        <p:txBody>
+          <a:bodyPr wrap="square">
+            <a:spAutoFit/>
+          </a:bodyPr>
+          <a:lstStyle/>
+          <a:p>
+            <a:pPr algn="l"/>
+            <a:r>
+              <a:rPr sz="750" b="0">
+                <a:solidFill>
+                  <a:srgbClr val="1A1408"/>
+                </a:solidFill>
+                <a:latin typeface="メイリオ"/>
+              </a:rPr>
+              <a:t>サブ液晶の2サイコロでスイカ天井
+までの残り回数を示唆
+ゾロ目は設定示唆も兼ねる</a:t>
+            </a:r>
+          </a:p>
+        </p:txBody>
+      </p:sp>
+      <p:sp>
+        <p:nvSpPr>
+          <p:cNvPr id="29" name="Rectangle 28"/>
+          <p:cNvSpPr/>
+          <p:nvPr/>
+        </p:nvSpPr>
+        <p:spPr>
+          <a:xfrm>
+            <a:off x="0" y="4617720"/>
+            <a:ext cx="9144000" cy="502920"/>
+          </a:xfrm>
+          <a:prstGeom prst="rect">
+            <a:avLst/>
+          </a:prstGeom>
+          <a:solidFill>
+            <a:srgbClr val="0C7A3F"/>
+          </a:solidFill>
+          <a:ln>
+            <a:noFill/>
+          </a:ln>
+        </p:spPr>
+        <p:style>
+          <a:lnRef idx="1">
+            <a:schemeClr val="accent1"/>
+          </a:lnRef>
+          <a:fillRef idx="3">
+            <a:schemeClr val="accent1"/>
+          </a:fillRef>
+          <a:effectRef idx="2">
+            <a:schemeClr val="accent1"/>
+          </a:effectRef>
+          <a:fontRef idx="minor">
+            <a:schemeClr val="lt1"/>
+          </a:fontRef>
+        </p:style>
+        <p:txBody>
+          <a:bodyPr rtlCol="0" anchor="ctr"/>
+          <a:lstStyle/>
+          <a:p>
+            <a:pPr algn="ctr"/>
+          </a:p>
+        </p:txBody>
+      </p:sp>
+      <p:sp>
+        <p:nvSpPr>
+          <p:cNvPr id="30" name="TextBox 29"/>
+          <p:cNvSpPr txBox="1"/>
+          <p:nvPr/>
+        </p:nvSpPr>
+        <p:spPr>
+          <a:xfrm>
             <a:off x="182880" y="4647720"/>
             <a:ext cx="6400800" cy="380000"/>
           </a:xfrm>
@@ -8597,7 +9235,7 @@
       </p:sp>
       <p:sp>
         <p:nvSpPr>
-          <p:cNvPr id="28" name="TextBox 27"/>
+          <p:cNvPr id="31" name="TextBox 30"/>
           <p:cNvSpPr txBox="1"/>
           <p:nvPr/>
         </p:nvSpPr>
@@ -8632,7 +9270,7 @@
       </p:sp>
       <p:sp>
         <p:nvSpPr>
-          <p:cNvPr id="29" name="TextBox 28"/>
+          <p:cNvPr id="32" name="TextBox 31"/>
           <p:cNvSpPr txBox="1"/>
           <p:nvPr/>
         </p:nvSpPr>
